--- a/delivery/slides/slides.pptx
+++ b/delivery/slides/slides.pptx
@@ -35,6 +35,7 @@
     <p:sldId id="283" r:id="rId34"/>
     <p:sldId id="284" r:id="rId35"/>
     <p:sldId id="285" r:id="rId36"/>
+    <p:sldId id="286" r:id="rId37"/>
   </p:sldIdLst>
   <p:sldSz cx="12191695" cy="6858000" type="screen4x3"/>
   <p:notesSz cx="6858000" cy="9144000"/>
@@ -4086,6 +4087,48 @@
       <p:pic>
         <p:nvPicPr>
           <p:cNvPr id="2" name="Picture 1" descr="p-30.png"/>
+          <p:cNvPicPr>
+            <a:picLocks noChangeAspect="1"/>
+          </p:cNvPicPr>
+          <p:nvPr/>
+        </p:nvPicPr>
+        <p:blipFill>
+          <a:blip r:embed="rId2"/>
+          <a:stretch>
+            <a:fillRect/>
+          </a:stretch>
+        </p:blipFill>
+        <p:spPr>
+          <a:xfrm>
+            <a:off x="0" y="0"/>
+            <a:ext cx="12191695" cy="6858000"/>
+          </a:xfrm>
+          <a:prstGeom prst="rect">
+            <a:avLst/>
+          </a:prstGeom>
+        </p:spPr>
+      </p:pic>
+    </p:spTree>
+  </p:cSld>
+  <p:clrMapOvr>
+    <a:masterClrMapping/>
+  </p:clrMapOvr>
+</p:sld>
+</file>
+
+<file path=ppt/slides/slide31.xml><?xml version="1.0" encoding="utf-8"?>
+<p:sld xmlns:a="http://schemas.openxmlformats.org/drawingml/2006/main" xmlns:p="http://schemas.openxmlformats.org/presentationml/2006/main" xmlns:r="http://schemas.openxmlformats.org/officeDocument/2006/relationships">
+  <p:cSld>
+    <p:spTree>
+      <p:nvGrpSpPr>
+        <p:cNvPr id="1" name=""/>
+        <p:cNvGrpSpPr/>
+        <p:nvPr/>
+      </p:nvGrpSpPr>
+      <p:grpSpPr/>
+      <p:pic>
+        <p:nvPicPr>
+          <p:cNvPr id="2" name="Picture 1" descr="p-31.png"/>
           <p:cNvPicPr>
             <a:picLocks noChangeAspect="1"/>
           </p:cNvPicPr>

--- a/delivery/slides/slides.pptx
+++ b/delivery/slides/slides.pptx
@@ -37,7 +37,7 @@
     <p:sldId id="285" r:id="rId36"/>
     <p:sldId id="286" r:id="rId37"/>
   </p:sldIdLst>
-  <p:sldSz cx="12191695" cy="6858000" type="screen4x3"/>
+  <p:sldSz cx="5760720" cy="3243072" type="screen4x3"/>
   <p:notesSz cx="6858000" cy="9144000"/>
   <p:defaultTextStyle>
     <a:defPPr>
@@ -3135,7 +3135,7 @@
         <p:spPr>
           <a:xfrm>
             <a:off x="0" y="0"/>
-            <a:ext cx="12191695" cy="6858000"/>
+            <a:ext cx="5760720" cy="3243072"/>
           </a:xfrm>
           <a:prstGeom prst="rect">
             <a:avLst/>
@@ -3177,7 +3177,7 @@
         <p:spPr>
           <a:xfrm>
             <a:off x="0" y="0"/>
-            <a:ext cx="12191695" cy="6858000"/>
+            <a:ext cx="5760720" cy="3243072"/>
           </a:xfrm>
           <a:prstGeom prst="rect">
             <a:avLst/>
@@ -3219,7 +3219,7 @@
         <p:spPr>
           <a:xfrm>
             <a:off x="0" y="0"/>
-            <a:ext cx="12191695" cy="6858000"/>
+            <a:ext cx="5760720" cy="3243072"/>
           </a:xfrm>
           <a:prstGeom prst="rect">
             <a:avLst/>
@@ -3261,7 +3261,7 @@
         <p:spPr>
           <a:xfrm>
             <a:off x="0" y="0"/>
-            <a:ext cx="12191695" cy="6858000"/>
+            <a:ext cx="5760720" cy="3243072"/>
           </a:xfrm>
           <a:prstGeom prst="rect">
             <a:avLst/>
@@ -3303,7 +3303,7 @@
         <p:spPr>
           <a:xfrm>
             <a:off x="0" y="0"/>
-            <a:ext cx="12191695" cy="6858000"/>
+            <a:ext cx="5760720" cy="3243072"/>
           </a:xfrm>
           <a:prstGeom prst="rect">
             <a:avLst/>
@@ -3345,7 +3345,7 @@
         <p:spPr>
           <a:xfrm>
             <a:off x="0" y="0"/>
-            <a:ext cx="12191695" cy="6858000"/>
+            <a:ext cx="5760720" cy="3243072"/>
           </a:xfrm>
           <a:prstGeom prst="rect">
             <a:avLst/>
@@ -3387,7 +3387,7 @@
         <p:spPr>
           <a:xfrm>
             <a:off x="0" y="0"/>
-            <a:ext cx="12191695" cy="6858000"/>
+            <a:ext cx="5760720" cy="3243072"/>
           </a:xfrm>
           <a:prstGeom prst="rect">
             <a:avLst/>
@@ -3429,7 +3429,7 @@
         <p:spPr>
           <a:xfrm>
             <a:off x="0" y="0"/>
-            <a:ext cx="12191695" cy="6858000"/>
+            <a:ext cx="5760720" cy="3243072"/>
           </a:xfrm>
           <a:prstGeom prst="rect">
             <a:avLst/>
@@ -3471,7 +3471,7 @@
         <p:spPr>
           <a:xfrm>
             <a:off x="0" y="0"/>
-            <a:ext cx="12191695" cy="6858000"/>
+            <a:ext cx="5760720" cy="3243072"/>
           </a:xfrm>
           <a:prstGeom prst="rect">
             <a:avLst/>
@@ -3513,7 +3513,7 @@
         <p:spPr>
           <a:xfrm>
             <a:off x="0" y="0"/>
-            <a:ext cx="12191695" cy="6858000"/>
+            <a:ext cx="5760720" cy="3243072"/>
           </a:xfrm>
           <a:prstGeom prst="rect">
             <a:avLst/>
@@ -3555,7 +3555,7 @@
         <p:spPr>
           <a:xfrm>
             <a:off x="0" y="0"/>
-            <a:ext cx="12191695" cy="6858000"/>
+            <a:ext cx="5760720" cy="3243072"/>
           </a:xfrm>
           <a:prstGeom prst="rect">
             <a:avLst/>
@@ -3597,7 +3597,7 @@
         <p:spPr>
           <a:xfrm>
             <a:off x="0" y="0"/>
-            <a:ext cx="12191695" cy="6858000"/>
+            <a:ext cx="5760720" cy="3243072"/>
           </a:xfrm>
           <a:prstGeom prst="rect">
             <a:avLst/>
@@ -3639,7 +3639,7 @@
         <p:spPr>
           <a:xfrm>
             <a:off x="0" y="0"/>
-            <a:ext cx="12191695" cy="6858000"/>
+            <a:ext cx="5760720" cy="3243072"/>
           </a:xfrm>
           <a:prstGeom prst="rect">
             <a:avLst/>
@@ -3681,7 +3681,7 @@
         <p:spPr>
           <a:xfrm>
             <a:off x="0" y="0"/>
-            <a:ext cx="12191695" cy="6858000"/>
+            <a:ext cx="5760720" cy="3243072"/>
           </a:xfrm>
           <a:prstGeom prst="rect">
             <a:avLst/>
@@ -3723,7 +3723,7 @@
         <p:spPr>
           <a:xfrm>
             <a:off x="0" y="0"/>
-            <a:ext cx="12191695" cy="6858000"/>
+            <a:ext cx="5760720" cy="3243072"/>
           </a:xfrm>
           <a:prstGeom prst="rect">
             <a:avLst/>
@@ -3765,7 +3765,7 @@
         <p:spPr>
           <a:xfrm>
             <a:off x="0" y="0"/>
-            <a:ext cx="12191695" cy="6858000"/>
+            <a:ext cx="5760720" cy="3243072"/>
           </a:xfrm>
           <a:prstGeom prst="rect">
             <a:avLst/>
@@ -3807,7 +3807,7 @@
         <p:spPr>
           <a:xfrm>
             <a:off x="0" y="0"/>
-            <a:ext cx="12191695" cy="6858000"/>
+            <a:ext cx="5760720" cy="3243072"/>
           </a:xfrm>
           <a:prstGeom prst="rect">
             <a:avLst/>
@@ -3849,7 +3849,7 @@
         <p:spPr>
           <a:xfrm>
             <a:off x="0" y="0"/>
-            <a:ext cx="12191695" cy="6858000"/>
+            <a:ext cx="5760720" cy="3243072"/>
           </a:xfrm>
           <a:prstGeom prst="rect">
             <a:avLst/>
@@ -3891,7 +3891,7 @@
         <p:spPr>
           <a:xfrm>
             <a:off x="0" y="0"/>
-            <a:ext cx="12191695" cy="6858000"/>
+            <a:ext cx="5760720" cy="3243072"/>
           </a:xfrm>
           <a:prstGeom prst="rect">
             <a:avLst/>
@@ -3933,7 +3933,7 @@
         <p:spPr>
           <a:xfrm>
             <a:off x="0" y="0"/>
-            <a:ext cx="12191695" cy="6858000"/>
+            <a:ext cx="5760720" cy="3243072"/>
           </a:xfrm>
           <a:prstGeom prst="rect">
             <a:avLst/>
@@ -3975,7 +3975,7 @@
         <p:spPr>
           <a:xfrm>
             <a:off x="0" y="0"/>
-            <a:ext cx="12191695" cy="6858000"/>
+            <a:ext cx="5760720" cy="3243072"/>
           </a:xfrm>
           <a:prstGeom prst="rect">
             <a:avLst/>
@@ -4017,7 +4017,7 @@
         <p:spPr>
           <a:xfrm>
             <a:off x="0" y="0"/>
-            <a:ext cx="12191695" cy="6858000"/>
+            <a:ext cx="5760720" cy="3243072"/>
           </a:xfrm>
           <a:prstGeom prst="rect">
             <a:avLst/>
@@ -4059,7 +4059,7 @@
         <p:spPr>
           <a:xfrm>
             <a:off x="0" y="0"/>
-            <a:ext cx="12191695" cy="6858000"/>
+            <a:ext cx="5760720" cy="3243072"/>
           </a:xfrm>
           <a:prstGeom prst="rect">
             <a:avLst/>
@@ -4101,7 +4101,7 @@
         <p:spPr>
           <a:xfrm>
             <a:off x="0" y="0"/>
-            <a:ext cx="12191695" cy="6858000"/>
+            <a:ext cx="5760720" cy="3243072"/>
           </a:xfrm>
           <a:prstGeom prst="rect">
             <a:avLst/>
@@ -4143,7 +4143,7 @@
         <p:spPr>
           <a:xfrm>
             <a:off x="0" y="0"/>
-            <a:ext cx="12191695" cy="6858000"/>
+            <a:ext cx="5760720" cy="3243072"/>
           </a:xfrm>
           <a:prstGeom prst="rect">
             <a:avLst/>
@@ -4185,7 +4185,7 @@
         <p:spPr>
           <a:xfrm>
             <a:off x="0" y="0"/>
-            <a:ext cx="12191695" cy="6858000"/>
+            <a:ext cx="5760720" cy="3243072"/>
           </a:xfrm>
           <a:prstGeom prst="rect">
             <a:avLst/>
@@ -4227,7 +4227,7 @@
         <p:spPr>
           <a:xfrm>
             <a:off x="0" y="0"/>
-            <a:ext cx="12191695" cy="6858000"/>
+            <a:ext cx="5760720" cy="3243072"/>
           </a:xfrm>
           <a:prstGeom prst="rect">
             <a:avLst/>
@@ -4269,7 +4269,7 @@
         <p:spPr>
           <a:xfrm>
             <a:off x="0" y="0"/>
-            <a:ext cx="12191695" cy="6858000"/>
+            <a:ext cx="5760720" cy="3243072"/>
           </a:xfrm>
           <a:prstGeom prst="rect">
             <a:avLst/>
@@ -4311,7 +4311,7 @@
         <p:spPr>
           <a:xfrm>
             <a:off x="0" y="0"/>
-            <a:ext cx="12191695" cy="6858000"/>
+            <a:ext cx="5760720" cy="3243072"/>
           </a:xfrm>
           <a:prstGeom prst="rect">
             <a:avLst/>
@@ -4353,7 +4353,7 @@
         <p:spPr>
           <a:xfrm>
             <a:off x="0" y="0"/>
-            <a:ext cx="12191695" cy="6858000"/>
+            <a:ext cx="5760720" cy="3243072"/>
           </a:xfrm>
           <a:prstGeom prst="rect">
             <a:avLst/>
@@ -4395,7 +4395,7 @@
         <p:spPr>
           <a:xfrm>
             <a:off x="0" y="0"/>
-            <a:ext cx="12191695" cy="6858000"/>
+            <a:ext cx="5760720" cy="3243072"/>
           </a:xfrm>
           <a:prstGeom prst="rect">
             <a:avLst/>
